--- a/courseware/202609_ADS_W04_Python_Basics_Algorithm_Analysis.pptx
+++ b/courseware/202609_ADS_W04_Python_Basics_Algorithm_Analysis.pptx
@@ -24731,7 +24731,7 @@
                 <a:ea typeface="Microsoft YaHei" pitchFamily="34" charset="-122"/>
                 <a:cs typeface="Microsoft YaHei" pitchFamily="34" charset="-120"/>
               </a:rPr>
-              <a:t>本周作业 · 思考题 · 小结</a:t>
+              <a:t>本周练习 · 思考题 · 小结</a:t>
             </a:r>
             <a:endParaRPr lang="en-US" sz="1200" dirty="0"/>
           </a:p>
@@ -31484,7 +31484,7 @@
                 <a:ea typeface="Microsoft YaHei" pitchFamily="34" charset="-122"/>
                 <a:cs typeface="Microsoft YaHei" pitchFamily="34" charset="-120"/>
               </a:rPr>
-              <a:t>本周作业</a:t>
+              <a:t>本周练习</a:t>
             </a:r>
             <a:endParaRPr lang="en-US" sz="900" dirty="0"/>
           </a:p>
@@ -31523,7 +31523,7 @@
                 <a:ea typeface="Microsoft YaHei" pitchFamily="34" charset="-122"/>
                 <a:cs typeface="Microsoft YaHei" pitchFamily="34" charset="-120"/>
               </a:rPr>
-              <a:t>本周作业</a:t>
+              <a:t>本周练习</a:t>
             </a:r>
             <a:endParaRPr lang="en-US" sz="2000" dirty="0"/>
           </a:p>
@@ -34443,7 +34443,7 @@
                 <a:ea typeface="Microsoft YaHei" pitchFamily="34" charset="-122"/>
                 <a:cs typeface="Microsoft YaHei" pitchFamily="34" charset="-120"/>
               </a:rPr>
-              <a:t>本周作业 · 思考题</a:t>
+              <a:t>本周练习 · 思考题</a:t>
             </a:r>
             <a:endParaRPr lang="en-US" sz="900" dirty="0"/>
           </a:p>
